--- a/icons/splashscreens.pptx
+++ b/icons/splashscreens.pptx
@@ -264,7 +264,7 @@
           <a:p>
             <a:fld id="{D95F3F3F-3E05-4475-BDF7-9F1F10448BC5}" type="datetimeFigureOut">
               <a:rPr lang="fr-FR" smtClean="0"/>
-              <a:t>23/09/2025</a:t>
+              <a:t>19/11/2025</a:t>
             </a:fld>
             <a:endParaRPr lang="fr-FR"/>
           </a:p>
@@ -462,7 +462,7 @@
           <a:p>
             <a:fld id="{D95F3F3F-3E05-4475-BDF7-9F1F10448BC5}" type="datetimeFigureOut">
               <a:rPr lang="fr-FR" smtClean="0"/>
-              <a:t>23/09/2025</a:t>
+              <a:t>19/11/2025</a:t>
             </a:fld>
             <a:endParaRPr lang="fr-FR"/>
           </a:p>
@@ -670,7 +670,7 @@
           <a:p>
             <a:fld id="{D95F3F3F-3E05-4475-BDF7-9F1F10448BC5}" type="datetimeFigureOut">
               <a:rPr lang="fr-FR" smtClean="0"/>
-              <a:t>23/09/2025</a:t>
+              <a:t>19/11/2025</a:t>
             </a:fld>
             <a:endParaRPr lang="fr-FR"/>
           </a:p>
@@ -868,7 +868,7 @@
           <a:p>
             <a:fld id="{D95F3F3F-3E05-4475-BDF7-9F1F10448BC5}" type="datetimeFigureOut">
               <a:rPr lang="fr-FR" smtClean="0"/>
-              <a:t>23/09/2025</a:t>
+              <a:t>19/11/2025</a:t>
             </a:fld>
             <a:endParaRPr lang="fr-FR"/>
           </a:p>
@@ -1143,7 +1143,7 @@
           <a:p>
             <a:fld id="{D95F3F3F-3E05-4475-BDF7-9F1F10448BC5}" type="datetimeFigureOut">
               <a:rPr lang="fr-FR" smtClean="0"/>
-              <a:t>23/09/2025</a:t>
+              <a:t>19/11/2025</a:t>
             </a:fld>
             <a:endParaRPr lang="fr-FR"/>
           </a:p>
@@ -1408,7 +1408,7 @@
           <a:p>
             <a:fld id="{D95F3F3F-3E05-4475-BDF7-9F1F10448BC5}" type="datetimeFigureOut">
               <a:rPr lang="fr-FR" smtClean="0"/>
-              <a:t>23/09/2025</a:t>
+              <a:t>19/11/2025</a:t>
             </a:fld>
             <a:endParaRPr lang="fr-FR"/>
           </a:p>
@@ -1820,7 +1820,7 @@
           <a:p>
             <a:fld id="{D95F3F3F-3E05-4475-BDF7-9F1F10448BC5}" type="datetimeFigureOut">
               <a:rPr lang="fr-FR" smtClean="0"/>
-              <a:t>23/09/2025</a:t>
+              <a:t>19/11/2025</a:t>
             </a:fld>
             <a:endParaRPr lang="fr-FR"/>
           </a:p>
@@ -1961,7 +1961,7 @@
           <a:p>
             <a:fld id="{D95F3F3F-3E05-4475-BDF7-9F1F10448BC5}" type="datetimeFigureOut">
               <a:rPr lang="fr-FR" smtClean="0"/>
-              <a:t>23/09/2025</a:t>
+              <a:t>19/11/2025</a:t>
             </a:fld>
             <a:endParaRPr lang="fr-FR"/>
           </a:p>
@@ -2074,7 +2074,7 @@
           <a:p>
             <a:fld id="{D95F3F3F-3E05-4475-BDF7-9F1F10448BC5}" type="datetimeFigureOut">
               <a:rPr lang="fr-FR" smtClean="0"/>
-              <a:t>23/09/2025</a:t>
+              <a:t>19/11/2025</a:t>
             </a:fld>
             <a:endParaRPr lang="fr-FR"/>
           </a:p>
@@ -2385,7 +2385,7 @@
           <a:p>
             <a:fld id="{D95F3F3F-3E05-4475-BDF7-9F1F10448BC5}" type="datetimeFigureOut">
               <a:rPr lang="fr-FR" smtClean="0"/>
-              <a:t>23/09/2025</a:t>
+              <a:t>19/11/2025</a:t>
             </a:fld>
             <a:endParaRPr lang="fr-FR"/>
           </a:p>
@@ -2673,7 +2673,7 @@
           <a:p>
             <a:fld id="{D95F3F3F-3E05-4475-BDF7-9F1F10448BC5}" type="datetimeFigureOut">
               <a:rPr lang="fr-FR" smtClean="0"/>
-              <a:t>23/09/2025</a:t>
+              <a:t>19/11/2025</a:t>
             </a:fld>
             <a:endParaRPr lang="fr-FR"/>
           </a:p>
@@ -2914,7 +2914,7 @@
           <a:p>
             <a:fld id="{D95F3F3F-3E05-4475-BDF7-9F1F10448BC5}" type="datetimeFigureOut">
               <a:rPr lang="fr-FR" smtClean="0"/>
-              <a:t>23/09/2025</a:t>
+              <a:t>19/11/2025</a:t>
             </a:fld>
             <a:endParaRPr lang="fr-FR"/>
           </a:p>
@@ -7225,6 +7225,544 @@
           </a:prstGeom>
         </p:spPr>
       </p:pic>
+      <p:sp>
+        <p:nvSpPr>
+          <p:cNvPr id="13" name="Rectangle : avec coin rogné 12">
+            <a:extLst>
+              <a:ext uri="{FF2B5EF4-FFF2-40B4-BE49-F238E27FC236}">
+                <a16:creationId xmlns:a16="http://schemas.microsoft.com/office/drawing/2014/main" id="{F2BD7396-4142-4FAA-86A1-3D35F83A0CBC}"/>
+              </a:ext>
+            </a:extLst>
+          </p:cNvPr>
+          <p:cNvSpPr/>
+          <p:nvPr/>
+        </p:nvSpPr>
+        <p:spPr>
+          <a:xfrm>
+            <a:off x="5731829" y="2580036"/>
+            <a:ext cx="2824328" cy="1697927"/>
+          </a:xfrm>
+          <a:prstGeom prst="snip1Rect">
+            <a:avLst>
+              <a:gd name="adj" fmla="val 5556"/>
+            </a:avLst>
+          </a:prstGeom>
+          <a:solidFill>
+            <a:srgbClr val="2D2D30"/>
+          </a:solidFill>
+          <a:ln>
+            <a:noFill/>
+          </a:ln>
+        </p:spPr>
+        <p:style>
+          <a:lnRef idx="2">
+            <a:schemeClr val="accent1">
+              <a:shade val="50000"/>
+            </a:schemeClr>
+          </a:lnRef>
+          <a:fillRef idx="1">
+            <a:schemeClr val="accent1"/>
+          </a:fillRef>
+          <a:effectRef idx="0">
+            <a:schemeClr val="accent1"/>
+          </a:effectRef>
+          <a:fontRef idx="minor">
+            <a:schemeClr val="lt1"/>
+          </a:fontRef>
+        </p:style>
+        <p:txBody>
+          <a:bodyPr rtlCol="0" anchor="ctr"/>
+          <a:lstStyle/>
+          <a:p>
+            <a:pPr algn="ctr"/>
+            <a:endParaRPr lang="fr-FR"/>
+          </a:p>
+        </p:txBody>
+      </p:sp>
+      <p:sp>
+        <p:nvSpPr>
+          <p:cNvPr id="15" name="ZoneTexte 14">
+            <a:extLst>
+              <a:ext uri="{FF2B5EF4-FFF2-40B4-BE49-F238E27FC236}">
+                <a16:creationId xmlns:a16="http://schemas.microsoft.com/office/drawing/2014/main" id="{DC624550-1415-4908-8F8E-8230E3D8E80D}"/>
+              </a:ext>
+            </a:extLst>
+          </p:cNvPr>
+          <p:cNvSpPr txBox="1"/>
+          <p:nvPr/>
+        </p:nvSpPr>
+        <p:spPr>
+          <a:xfrm>
+            <a:off x="6044238" y="2698974"/>
+            <a:ext cx="1272579" cy="307777"/>
+          </a:xfrm>
+          <a:prstGeom prst="rect">
+            <a:avLst/>
+          </a:prstGeom>
+          <a:noFill/>
+        </p:spPr>
+        <p:txBody>
+          <a:bodyPr wrap="square" rtlCol="0">
+            <a:spAutoFit/>
+          </a:bodyPr>
+          <a:lstStyle/>
+          <a:p>
+            <a:r>
+              <a:rPr lang="fr-FR" sz="1400" b="1" dirty="0" err="1">
+                <a:solidFill>
+                  <a:schemeClr val="bg1"/>
+                </a:solidFill>
+                <a:latin typeface="+mj-lt"/>
+                <a:cs typeface="Arial" panose="020B0604020202020204" pitchFamily="34" charset="0"/>
+              </a:rPr>
+              <a:t>ThermaVIP</a:t>
+            </a:r>
+            <a:r>
+              <a:rPr lang="fr-FR" sz="1400" b="1" dirty="0">
+                <a:solidFill>
+                  <a:schemeClr val="bg1"/>
+                </a:solidFill>
+                <a:latin typeface="+mj-lt"/>
+                <a:cs typeface="Arial" panose="020B0604020202020204" pitchFamily="34" charset="0"/>
+              </a:rPr>
+              <a:t> </a:t>
+            </a:r>
+          </a:p>
+        </p:txBody>
+      </p:sp>
+      <p:pic>
+        <p:nvPicPr>
+          <p:cNvPr id="16" name="Image 15">
+            <a:extLst>
+              <a:ext uri="{FF2B5EF4-FFF2-40B4-BE49-F238E27FC236}">
+                <a16:creationId xmlns:a16="http://schemas.microsoft.com/office/drawing/2014/main" id="{5BED6411-DEE5-4CE4-80BD-C48CE1CE216D}"/>
+              </a:ext>
+            </a:extLst>
+          </p:cNvPr>
+          <p:cNvPicPr>
+            <a:picLocks noChangeAspect="1"/>
+          </p:cNvPicPr>
+          <p:nvPr/>
+        </p:nvPicPr>
+        <p:blipFill>
+          <a:blip r:embed="rId2"/>
+          <a:stretch>
+            <a:fillRect/>
+          </a:stretch>
+        </p:blipFill>
+        <p:spPr>
+          <a:xfrm>
+            <a:off x="5733671" y="2968600"/>
+            <a:ext cx="98680" cy="170330"/>
+          </a:xfrm>
+          <a:prstGeom prst="rect">
+            <a:avLst/>
+          </a:prstGeom>
+        </p:spPr>
+      </p:pic>
+      <p:sp>
+        <p:nvSpPr>
+          <p:cNvPr id="17" name="ZoneTexte 16">
+            <a:extLst>
+              <a:ext uri="{FF2B5EF4-FFF2-40B4-BE49-F238E27FC236}">
+                <a16:creationId xmlns:a16="http://schemas.microsoft.com/office/drawing/2014/main" id="{DE9569CF-20A8-4C28-B8A8-6C9E69A0C3D4}"/>
+              </a:ext>
+            </a:extLst>
+          </p:cNvPr>
+          <p:cNvSpPr txBox="1"/>
+          <p:nvPr/>
+        </p:nvSpPr>
+        <p:spPr>
+          <a:xfrm>
+            <a:off x="5792439" y="2921246"/>
+            <a:ext cx="1257339" cy="261610"/>
+          </a:xfrm>
+          <a:prstGeom prst="rect">
+            <a:avLst/>
+          </a:prstGeom>
+          <a:noFill/>
+        </p:spPr>
+        <p:txBody>
+          <a:bodyPr wrap="square" rtlCol="0">
+            <a:spAutoFit/>
+          </a:bodyPr>
+          <a:lstStyle/>
+          <a:p>
+            <a:r>
+              <a:rPr lang="fr-FR" sz="1050" dirty="0">
+                <a:solidFill>
+                  <a:schemeClr val="bg1"/>
+                </a:solidFill>
+                <a:latin typeface="+mj-lt"/>
+                <a:cs typeface="Arial" panose="020B0604020202020204" pitchFamily="34" charset="0"/>
+              </a:rPr>
+              <a:t>W7-X </a:t>
+            </a:r>
+            <a:r>
+              <a:rPr lang="fr-FR" sz="1050" dirty="0" err="1">
+                <a:solidFill>
+                  <a:schemeClr val="bg1"/>
+                </a:solidFill>
+                <a:latin typeface="+mj-lt"/>
+                <a:cs typeface="Arial" panose="020B0604020202020204" pitchFamily="34" charset="0"/>
+              </a:rPr>
+              <a:t>edition</a:t>
+            </a:r>
+            <a:r>
+              <a:rPr lang="fr-FR" sz="1050" dirty="0">
+                <a:solidFill>
+                  <a:schemeClr val="bg1"/>
+                </a:solidFill>
+                <a:latin typeface="+mj-lt"/>
+                <a:cs typeface="Arial" panose="020B0604020202020204" pitchFamily="34" charset="0"/>
+              </a:rPr>
+              <a:t> 2025</a:t>
+            </a:r>
+          </a:p>
+        </p:txBody>
+      </p:sp>
+      <p:sp>
+        <p:nvSpPr>
+          <p:cNvPr id="18" name="Triangle rectangle 17">
+            <a:extLst>
+              <a:ext uri="{FF2B5EF4-FFF2-40B4-BE49-F238E27FC236}">
+                <a16:creationId xmlns:a16="http://schemas.microsoft.com/office/drawing/2014/main" id="{24532917-913F-40F1-BD43-F6A58514D7E5}"/>
+              </a:ext>
+            </a:extLst>
+          </p:cNvPr>
+          <p:cNvSpPr/>
+          <p:nvPr/>
+        </p:nvSpPr>
+        <p:spPr>
+          <a:xfrm>
+            <a:off x="8461590" y="2580977"/>
+            <a:ext cx="95136" cy="93927"/>
+          </a:xfrm>
+          <a:prstGeom prst="rtTriangle">
+            <a:avLst/>
+          </a:prstGeom>
+          <a:solidFill>
+            <a:schemeClr val="tx1">
+              <a:lumMod val="65000"/>
+              <a:lumOff val="35000"/>
+            </a:schemeClr>
+          </a:solidFill>
+          <a:ln>
+            <a:noFill/>
+          </a:ln>
+        </p:spPr>
+        <p:style>
+          <a:lnRef idx="2">
+            <a:schemeClr val="accent1">
+              <a:shade val="50000"/>
+            </a:schemeClr>
+          </a:lnRef>
+          <a:fillRef idx="1">
+            <a:schemeClr val="accent1"/>
+          </a:fillRef>
+          <a:effectRef idx="0">
+            <a:schemeClr val="accent1"/>
+          </a:effectRef>
+          <a:fontRef idx="minor">
+            <a:schemeClr val="lt1"/>
+          </a:fontRef>
+        </p:style>
+        <p:txBody>
+          <a:bodyPr rtlCol="0" anchor="ctr"/>
+          <a:lstStyle/>
+          <a:p>
+            <a:pPr algn="ctr"/>
+            <a:endParaRPr lang="fr-FR" dirty="0"/>
+          </a:p>
+        </p:txBody>
+      </p:sp>
+      <p:sp>
+        <p:nvSpPr>
+          <p:cNvPr id="19" name="Rectangle 18">
+            <a:extLst>
+              <a:ext uri="{FF2B5EF4-FFF2-40B4-BE49-F238E27FC236}">
+                <a16:creationId xmlns:a16="http://schemas.microsoft.com/office/drawing/2014/main" id="{3BBD0746-5EE3-4B88-BDB8-F05B961936A8}"/>
+              </a:ext>
+            </a:extLst>
+          </p:cNvPr>
+          <p:cNvSpPr/>
+          <p:nvPr/>
+        </p:nvSpPr>
+        <p:spPr>
+          <a:xfrm>
+            <a:off x="5832351" y="3851718"/>
+            <a:ext cx="750526" cy="276999"/>
+          </a:xfrm>
+          <a:prstGeom prst="rect">
+            <a:avLst/>
+          </a:prstGeom>
+        </p:spPr>
+        <p:txBody>
+          <a:bodyPr wrap="none">
+            <a:spAutoFit/>
+          </a:bodyPr>
+          <a:lstStyle/>
+          <a:p>
+            <a:r>
+              <a:rPr lang="fr-FR" sz="600" dirty="0">
+                <a:solidFill>
+                  <a:schemeClr val="bg1"/>
+                </a:solidFill>
+                <a:latin typeface="+mj-lt"/>
+                <a:cs typeface="Arial" panose="020B0604020202020204" pitchFamily="34" charset="0"/>
+              </a:rPr>
+              <a:t>© CEA/IRFM</a:t>
+            </a:r>
+          </a:p>
+          <a:p>
+            <a:r>
+              <a:rPr lang="fr-FR" sz="600" dirty="0">
+                <a:solidFill>
+                  <a:schemeClr val="bg1"/>
+                </a:solidFill>
+                <a:latin typeface="+mj-lt"/>
+                <a:cs typeface="Arial" panose="020B0604020202020204" pitchFamily="34" charset="0"/>
+              </a:rPr>
+              <a:t>All </a:t>
+            </a:r>
+            <a:r>
+              <a:rPr lang="fr-FR" sz="600" dirty="0" err="1">
+                <a:solidFill>
+                  <a:schemeClr val="bg1"/>
+                </a:solidFill>
+                <a:latin typeface="+mj-lt"/>
+                <a:cs typeface="Arial" panose="020B0604020202020204" pitchFamily="34" charset="0"/>
+              </a:rPr>
+              <a:t>rights</a:t>
+            </a:r>
+            <a:r>
+              <a:rPr lang="fr-FR" sz="600" dirty="0">
+                <a:solidFill>
+                  <a:schemeClr val="bg1"/>
+                </a:solidFill>
+                <a:latin typeface="+mj-lt"/>
+                <a:cs typeface="Arial" panose="020B0604020202020204" pitchFamily="34" charset="0"/>
+              </a:rPr>
+              <a:t> </a:t>
+            </a:r>
+            <a:r>
+              <a:rPr lang="fr-FR" sz="600" dirty="0" err="1">
+                <a:solidFill>
+                  <a:schemeClr val="bg1"/>
+                </a:solidFill>
+                <a:latin typeface="+mj-lt"/>
+                <a:cs typeface="Arial" panose="020B0604020202020204" pitchFamily="34" charset="0"/>
+              </a:rPr>
+              <a:t>reserved</a:t>
+            </a:r>
+            <a:endParaRPr lang="fr-FR" sz="600" dirty="0">
+              <a:solidFill>
+                <a:schemeClr val="bg1"/>
+              </a:solidFill>
+              <a:latin typeface="+mj-lt"/>
+              <a:cs typeface="Arial" panose="020B0604020202020204" pitchFamily="34" charset="0"/>
+            </a:endParaRPr>
+          </a:p>
+        </p:txBody>
+      </p:sp>
+      <p:pic>
+        <p:nvPicPr>
+          <p:cNvPr id="20" name="Image 19">
+            <a:extLst>
+              <a:ext uri="{FF2B5EF4-FFF2-40B4-BE49-F238E27FC236}">
+                <a16:creationId xmlns:a16="http://schemas.microsoft.com/office/drawing/2014/main" id="{2DC4630C-39F2-4CD5-81B6-65C790F44155}"/>
+              </a:ext>
+            </a:extLst>
+          </p:cNvPr>
+          <p:cNvPicPr>
+            <a:picLocks noChangeAspect="1"/>
+          </p:cNvPicPr>
+          <p:nvPr/>
+        </p:nvPicPr>
+        <p:blipFill>
+          <a:blip r:embed="rId3">
+            <a:extLst>
+              <a:ext uri="{28A0092B-C50C-407E-A947-70E740481C1C}">
+                <a14:useLocalDpi xmlns:a14="http://schemas.microsoft.com/office/drawing/2010/main" val="0"/>
+              </a:ext>
+            </a:extLst>
+          </a:blip>
+          <a:stretch>
+            <a:fillRect/>
+          </a:stretch>
+        </p:blipFill>
+        <p:spPr>
+          <a:xfrm>
+            <a:off x="7641874" y="3851718"/>
+            <a:ext cx="357112" cy="289032"/>
+          </a:xfrm>
+          <a:prstGeom prst="rect">
+            <a:avLst/>
+          </a:prstGeom>
+        </p:spPr>
+      </p:pic>
+      <p:pic>
+        <p:nvPicPr>
+          <p:cNvPr id="21" name="Image 20">
+            <a:extLst>
+              <a:ext uri="{FF2B5EF4-FFF2-40B4-BE49-F238E27FC236}">
+                <a16:creationId xmlns:a16="http://schemas.microsoft.com/office/drawing/2014/main" id="{06B994AE-956A-4903-83C5-029C6EAE7141}"/>
+              </a:ext>
+            </a:extLst>
+          </p:cNvPr>
+          <p:cNvPicPr>
+            <a:picLocks noChangeAspect="1"/>
+          </p:cNvPicPr>
+          <p:nvPr/>
+        </p:nvPicPr>
+        <p:blipFill>
+          <a:blip r:embed="rId4">
+            <a:extLst>
+              <a:ext uri="{28A0092B-C50C-407E-A947-70E740481C1C}">
+                <a14:useLocalDpi xmlns:a14="http://schemas.microsoft.com/office/drawing/2010/main" val="0"/>
+              </a:ext>
+            </a:extLst>
+          </a:blip>
+          <a:stretch>
+            <a:fillRect/>
+          </a:stretch>
+        </p:blipFill>
+        <p:spPr>
+          <a:xfrm>
+            <a:off x="8055344" y="3868999"/>
+            <a:ext cx="403097" cy="250233"/>
+          </a:xfrm>
+          <a:prstGeom prst="rect">
+            <a:avLst/>
+          </a:prstGeom>
+        </p:spPr>
+      </p:pic>
+      <p:pic>
+        <p:nvPicPr>
+          <p:cNvPr id="22" name="Image 21">
+            <a:extLst>
+              <a:ext uri="{FF2B5EF4-FFF2-40B4-BE49-F238E27FC236}">
+                <a16:creationId xmlns:a16="http://schemas.microsoft.com/office/drawing/2014/main" id="{D1C60995-EB7E-4023-A1E0-62231A6C90E6}"/>
+              </a:ext>
+            </a:extLst>
+          </p:cNvPr>
+          <p:cNvPicPr>
+            <a:picLocks noChangeAspect="1"/>
+          </p:cNvPicPr>
+          <p:nvPr/>
+        </p:nvPicPr>
+        <p:blipFill>
+          <a:blip r:embed="rId5">
+            <a:extLst>
+              <a:ext uri="{28A0092B-C50C-407E-A947-70E740481C1C}">
+                <a14:useLocalDpi xmlns:a14="http://schemas.microsoft.com/office/drawing/2010/main" val="0"/>
+              </a:ext>
+            </a:extLst>
+          </a:blip>
+          <a:stretch>
+            <a:fillRect/>
+          </a:stretch>
+        </p:blipFill>
+        <p:spPr>
+          <a:xfrm>
+            <a:off x="5862049" y="2764466"/>
+            <a:ext cx="214872" cy="204020"/>
+          </a:xfrm>
+          <a:prstGeom prst="rect">
+            <a:avLst/>
+          </a:prstGeom>
+        </p:spPr>
+      </p:pic>
+      <p:pic>
+        <p:nvPicPr>
+          <p:cNvPr id="3" name="Image 2">
+            <a:extLst>
+              <a:ext uri="{FF2B5EF4-FFF2-40B4-BE49-F238E27FC236}">
+                <a16:creationId xmlns:a16="http://schemas.microsoft.com/office/drawing/2014/main" id="{EE6B9CF5-0223-44B4-B370-34DE3F009851}"/>
+              </a:ext>
+            </a:extLst>
+          </p:cNvPr>
+          <p:cNvPicPr>
+            <a:picLocks noChangeAspect="1"/>
+          </p:cNvPicPr>
+          <p:nvPr/>
+        </p:nvPicPr>
+        <p:blipFill>
+          <a:blip r:embed="rId7"/>
+          <a:stretch>
+            <a:fillRect/>
+          </a:stretch>
+        </p:blipFill>
+        <p:spPr>
+          <a:xfrm>
+            <a:off x="7328435" y="2649470"/>
+            <a:ext cx="983989" cy="612260"/>
+          </a:xfrm>
+          <a:prstGeom prst="rect">
+            <a:avLst/>
+          </a:prstGeom>
+        </p:spPr>
+      </p:pic>
+      <p:pic>
+        <p:nvPicPr>
+          <p:cNvPr id="25" name="Image 24">
+            <a:extLst>
+              <a:ext uri="{FF2B5EF4-FFF2-40B4-BE49-F238E27FC236}">
+                <a16:creationId xmlns:a16="http://schemas.microsoft.com/office/drawing/2014/main" id="{702BF584-0C40-4C96-9417-D90AB5ED79AB}"/>
+              </a:ext>
+            </a:extLst>
+          </p:cNvPr>
+          <p:cNvPicPr>
+            <a:picLocks noChangeAspect="1"/>
+          </p:cNvPicPr>
+          <p:nvPr/>
+        </p:nvPicPr>
+        <p:blipFill>
+          <a:blip r:embed="rId8"/>
+          <a:stretch>
+            <a:fillRect/>
+          </a:stretch>
+        </p:blipFill>
+        <p:spPr>
+          <a:xfrm>
+            <a:off x="1833756" y="2461836"/>
+            <a:ext cx="3237805" cy="2103659"/>
+          </a:xfrm>
+          <a:prstGeom prst="rect">
+            <a:avLst/>
+          </a:prstGeom>
+        </p:spPr>
+      </p:pic>
+      <p:pic>
+        <p:nvPicPr>
+          <p:cNvPr id="27" name="Image 26">
+            <a:extLst>
+              <a:ext uri="{FF2B5EF4-FFF2-40B4-BE49-F238E27FC236}">
+                <a16:creationId xmlns:a16="http://schemas.microsoft.com/office/drawing/2014/main" id="{DA36FCC4-0265-4F11-879F-9E0C71AB3089}"/>
+              </a:ext>
+            </a:extLst>
+          </p:cNvPr>
+          <p:cNvPicPr>
+            <a:picLocks noChangeAspect="1"/>
+          </p:cNvPicPr>
+          <p:nvPr/>
+        </p:nvPicPr>
+        <p:blipFill>
+          <a:blip r:embed="rId9"/>
+          <a:stretch>
+            <a:fillRect/>
+          </a:stretch>
+        </p:blipFill>
+        <p:spPr>
+          <a:xfrm>
+            <a:off x="7197005" y="3770442"/>
+            <a:ext cx="439550" cy="439550"/>
+          </a:xfrm>
+          <a:prstGeom prst="rect">
+            <a:avLst/>
+          </a:prstGeom>
+        </p:spPr>
+      </p:pic>
     </p:spTree>
     <p:extLst>
       <p:ext uri="{BB962C8B-B14F-4D97-AF65-F5344CB8AC3E}">

--- a/icons/splashscreens.pptx
+++ b/icons/splashscreens.pptx
@@ -264,7 +264,7 @@
           <a:p>
             <a:fld id="{D95F3F3F-3E05-4475-BDF7-9F1F10448BC5}" type="datetimeFigureOut">
               <a:rPr lang="fr-FR" smtClean="0"/>
-              <a:t>19/11/2025</a:t>
+              <a:t>26/03/2026</a:t>
             </a:fld>
             <a:endParaRPr lang="fr-FR"/>
           </a:p>
@@ -462,7 +462,7 @@
           <a:p>
             <a:fld id="{D95F3F3F-3E05-4475-BDF7-9F1F10448BC5}" type="datetimeFigureOut">
               <a:rPr lang="fr-FR" smtClean="0"/>
-              <a:t>19/11/2025</a:t>
+              <a:t>26/03/2026</a:t>
             </a:fld>
             <a:endParaRPr lang="fr-FR"/>
           </a:p>
@@ -670,7 +670,7 @@
           <a:p>
             <a:fld id="{D95F3F3F-3E05-4475-BDF7-9F1F10448BC5}" type="datetimeFigureOut">
               <a:rPr lang="fr-FR" smtClean="0"/>
-              <a:t>19/11/2025</a:t>
+              <a:t>26/03/2026</a:t>
             </a:fld>
             <a:endParaRPr lang="fr-FR"/>
           </a:p>
@@ -868,7 +868,7 @@
           <a:p>
             <a:fld id="{D95F3F3F-3E05-4475-BDF7-9F1F10448BC5}" type="datetimeFigureOut">
               <a:rPr lang="fr-FR" smtClean="0"/>
-              <a:t>19/11/2025</a:t>
+              <a:t>26/03/2026</a:t>
             </a:fld>
             <a:endParaRPr lang="fr-FR"/>
           </a:p>
@@ -1143,7 +1143,7 @@
           <a:p>
             <a:fld id="{D95F3F3F-3E05-4475-BDF7-9F1F10448BC5}" type="datetimeFigureOut">
               <a:rPr lang="fr-FR" smtClean="0"/>
-              <a:t>19/11/2025</a:t>
+              <a:t>26/03/2026</a:t>
             </a:fld>
             <a:endParaRPr lang="fr-FR"/>
           </a:p>
@@ -1408,7 +1408,7 @@
           <a:p>
             <a:fld id="{D95F3F3F-3E05-4475-BDF7-9F1F10448BC5}" type="datetimeFigureOut">
               <a:rPr lang="fr-FR" smtClean="0"/>
-              <a:t>19/11/2025</a:t>
+              <a:t>26/03/2026</a:t>
             </a:fld>
             <a:endParaRPr lang="fr-FR"/>
           </a:p>
@@ -1820,7 +1820,7 @@
           <a:p>
             <a:fld id="{D95F3F3F-3E05-4475-BDF7-9F1F10448BC5}" type="datetimeFigureOut">
               <a:rPr lang="fr-FR" smtClean="0"/>
-              <a:t>19/11/2025</a:t>
+              <a:t>26/03/2026</a:t>
             </a:fld>
             <a:endParaRPr lang="fr-FR"/>
           </a:p>
@@ -1961,7 +1961,7 @@
           <a:p>
             <a:fld id="{D95F3F3F-3E05-4475-BDF7-9F1F10448BC5}" type="datetimeFigureOut">
               <a:rPr lang="fr-FR" smtClean="0"/>
-              <a:t>19/11/2025</a:t>
+              <a:t>26/03/2026</a:t>
             </a:fld>
             <a:endParaRPr lang="fr-FR"/>
           </a:p>
@@ -2074,7 +2074,7 @@
           <a:p>
             <a:fld id="{D95F3F3F-3E05-4475-BDF7-9F1F10448BC5}" type="datetimeFigureOut">
               <a:rPr lang="fr-FR" smtClean="0"/>
-              <a:t>19/11/2025</a:t>
+              <a:t>26/03/2026</a:t>
             </a:fld>
             <a:endParaRPr lang="fr-FR"/>
           </a:p>
@@ -2385,7 +2385,7 @@
           <a:p>
             <a:fld id="{D95F3F3F-3E05-4475-BDF7-9F1F10448BC5}" type="datetimeFigureOut">
               <a:rPr lang="fr-FR" smtClean="0"/>
-              <a:t>19/11/2025</a:t>
+              <a:t>26/03/2026</a:t>
             </a:fld>
             <a:endParaRPr lang="fr-FR"/>
           </a:p>
@@ -2673,7 +2673,7 @@
           <a:p>
             <a:fld id="{D95F3F3F-3E05-4475-BDF7-9F1F10448BC5}" type="datetimeFigureOut">
               <a:rPr lang="fr-FR" smtClean="0"/>
-              <a:t>19/11/2025</a:t>
+              <a:t>26/03/2026</a:t>
             </a:fld>
             <a:endParaRPr lang="fr-FR"/>
           </a:p>
@@ -2914,7 +2914,7 @@
           <a:p>
             <a:fld id="{D95F3F3F-3E05-4475-BDF7-9F1F10448BC5}" type="datetimeFigureOut">
               <a:rPr lang="fr-FR" smtClean="0"/>
-              <a:t>19/11/2025</a:t>
+              <a:t>26/03/2026</a:t>
             </a:fld>
             <a:endParaRPr lang="fr-FR"/>
           </a:p>
@@ -6126,6 +6126,115 @@
           </a:p>
         </p:txBody>
       </p:sp>
+      <p:sp>
+        <p:nvSpPr>
+          <p:cNvPr id="2" name="Ellipse 1">
+            <a:extLst>
+              <a:ext uri="{FF2B5EF4-FFF2-40B4-BE49-F238E27FC236}">
+                <a16:creationId xmlns:a16="http://schemas.microsoft.com/office/drawing/2014/main" id="{B4F18876-8957-428A-86CF-9D2223051B63}"/>
+              </a:ext>
+            </a:extLst>
+          </p:cNvPr>
+          <p:cNvSpPr/>
+          <p:nvPr/>
+        </p:nvSpPr>
+        <p:spPr>
+          <a:xfrm>
+            <a:off x="635000" y="592667"/>
+            <a:ext cx="180000" cy="180000"/>
+          </a:xfrm>
+          <a:prstGeom prst="ellipse">
+            <a:avLst/>
+          </a:prstGeom>
+          <a:solidFill>
+            <a:schemeClr val="bg1">
+              <a:lumMod val="95000"/>
+            </a:schemeClr>
+          </a:solidFill>
+          <a:ln>
+            <a:noFill/>
+          </a:ln>
+        </p:spPr>
+        <p:style>
+          <a:lnRef idx="2">
+            <a:schemeClr val="accent1">
+              <a:shade val="50000"/>
+            </a:schemeClr>
+          </a:lnRef>
+          <a:fillRef idx="1">
+            <a:schemeClr val="accent1"/>
+          </a:fillRef>
+          <a:effectRef idx="0">
+            <a:schemeClr val="accent1"/>
+          </a:effectRef>
+          <a:fontRef idx="minor">
+            <a:schemeClr val="lt1"/>
+          </a:fontRef>
+        </p:style>
+        <p:txBody>
+          <a:bodyPr lIns="0" tIns="0" rIns="0" bIns="0" rtlCol="0" anchor="ctr"/>
+          <a:lstStyle/>
+          <a:p>
+            <a:pPr algn="ctr"/>
+            <a:endParaRPr lang="en-US" sz="500" b="1" dirty="0">
+              <a:solidFill>
+                <a:schemeClr val="tx1"/>
+              </a:solidFill>
+              <a:latin typeface="Arial Narrow" panose="020B0606020202030204" pitchFamily="34" charset="0"/>
+            </a:endParaRPr>
+          </a:p>
+        </p:txBody>
+      </p:sp>
+      <p:sp>
+        <p:nvSpPr>
+          <p:cNvPr id="9" name="ZoneTexte 8">
+            <a:extLst>
+              <a:ext uri="{FF2B5EF4-FFF2-40B4-BE49-F238E27FC236}">
+                <a16:creationId xmlns:a16="http://schemas.microsoft.com/office/drawing/2014/main" id="{DF667AF5-B6C6-47E2-AD8B-BE3394C7D968}"/>
+              </a:ext>
+            </a:extLst>
+          </p:cNvPr>
+          <p:cNvSpPr txBox="1"/>
+          <p:nvPr/>
+        </p:nvSpPr>
+        <p:spPr>
+          <a:xfrm>
+            <a:off x="645624" y="648405"/>
+            <a:ext cx="153989" cy="76944"/>
+          </a:xfrm>
+          <a:prstGeom prst="rect">
+            <a:avLst/>
+          </a:prstGeom>
+          <a:noFill/>
+        </p:spPr>
+        <p:txBody>
+          <a:bodyPr wrap="square" lIns="0" tIns="0" rIns="0" bIns="0">
+            <a:spAutoFit/>
+          </a:bodyPr>
+          <a:lstStyle/>
+          <a:p>
+            <a:pPr algn="ctr"/>
+            <a:r>
+              <a:rPr kumimoji="0" lang="en-US" sz="500" b="1" i="0" u="none" strike="noStrike" kern="1200" cap="none" spc="0" normalizeH="0" baseline="0" noProof="0" dirty="0">
+                <a:ln>
+                  <a:noFill/>
+                </a:ln>
+                <a:solidFill>
+                  <a:prstClr val="black"/>
+                </a:solidFill>
+                <a:effectLst/>
+                <a:uLnTx/>
+                <a:uFillTx/>
+                <a:latin typeface="Arial Narrow" panose="020B0606020202030204" pitchFamily="34" charset="0"/>
+                <a:ea typeface="+mn-ea"/>
+                <a:cs typeface="+mn-cs"/>
+              </a:rPr>
+              <a:t>TSM</a:t>
+            </a:r>
+            <a:endParaRPr lang="en-US" dirty="0"/>
+          </a:p>
+        </p:txBody>
+      </p:sp>
     </p:spTree>
     <p:extLst>
       <p:ext uri="{BB962C8B-B14F-4D97-AF65-F5344CB8AC3E}">

--- a/icons/splashscreens.pptx
+++ b/icons/splashscreens.pptx
@@ -264,7 +264,7 @@
           <a:p>
             <a:fld id="{D95F3F3F-3E05-4475-BDF7-9F1F10448BC5}" type="datetimeFigureOut">
               <a:rPr lang="fr-FR" smtClean="0"/>
-              <a:t>26/03/2026</a:t>
+              <a:t>27/03/2026</a:t>
             </a:fld>
             <a:endParaRPr lang="fr-FR"/>
           </a:p>
@@ -462,7 +462,7 @@
           <a:p>
             <a:fld id="{D95F3F3F-3E05-4475-BDF7-9F1F10448BC5}" type="datetimeFigureOut">
               <a:rPr lang="fr-FR" smtClean="0"/>
-              <a:t>26/03/2026</a:t>
+              <a:t>27/03/2026</a:t>
             </a:fld>
             <a:endParaRPr lang="fr-FR"/>
           </a:p>
@@ -670,7 +670,7 @@
           <a:p>
             <a:fld id="{D95F3F3F-3E05-4475-BDF7-9F1F10448BC5}" type="datetimeFigureOut">
               <a:rPr lang="fr-FR" smtClean="0"/>
-              <a:t>26/03/2026</a:t>
+              <a:t>27/03/2026</a:t>
             </a:fld>
             <a:endParaRPr lang="fr-FR"/>
           </a:p>
@@ -868,7 +868,7 @@
           <a:p>
             <a:fld id="{D95F3F3F-3E05-4475-BDF7-9F1F10448BC5}" type="datetimeFigureOut">
               <a:rPr lang="fr-FR" smtClean="0"/>
-              <a:t>26/03/2026</a:t>
+              <a:t>27/03/2026</a:t>
             </a:fld>
             <a:endParaRPr lang="fr-FR"/>
           </a:p>
@@ -1143,7 +1143,7 @@
           <a:p>
             <a:fld id="{D95F3F3F-3E05-4475-BDF7-9F1F10448BC5}" type="datetimeFigureOut">
               <a:rPr lang="fr-FR" smtClean="0"/>
-              <a:t>26/03/2026</a:t>
+              <a:t>27/03/2026</a:t>
             </a:fld>
             <a:endParaRPr lang="fr-FR"/>
           </a:p>
@@ -1408,7 +1408,7 @@
           <a:p>
             <a:fld id="{D95F3F3F-3E05-4475-BDF7-9F1F10448BC5}" type="datetimeFigureOut">
               <a:rPr lang="fr-FR" smtClean="0"/>
-              <a:t>26/03/2026</a:t>
+              <a:t>27/03/2026</a:t>
             </a:fld>
             <a:endParaRPr lang="fr-FR"/>
           </a:p>
@@ -1820,7 +1820,7 @@
           <a:p>
             <a:fld id="{D95F3F3F-3E05-4475-BDF7-9F1F10448BC5}" type="datetimeFigureOut">
               <a:rPr lang="fr-FR" smtClean="0"/>
-              <a:t>26/03/2026</a:t>
+              <a:t>27/03/2026</a:t>
             </a:fld>
             <a:endParaRPr lang="fr-FR"/>
           </a:p>
@@ -1961,7 +1961,7 @@
           <a:p>
             <a:fld id="{D95F3F3F-3E05-4475-BDF7-9F1F10448BC5}" type="datetimeFigureOut">
               <a:rPr lang="fr-FR" smtClean="0"/>
-              <a:t>26/03/2026</a:t>
+              <a:t>27/03/2026</a:t>
             </a:fld>
             <a:endParaRPr lang="fr-FR"/>
           </a:p>
@@ -2074,7 +2074,7 @@
           <a:p>
             <a:fld id="{D95F3F3F-3E05-4475-BDF7-9F1F10448BC5}" type="datetimeFigureOut">
               <a:rPr lang="fr-FR" smtClean="0"/>
-              <a:t>26/03/2026</a:t>
+              <a:t>27/03/2026</a:t>
             </a:fld>
             <a:endParaRPr lang="fr-FR"/>
           </a:p>
@@ -2385,7 +2385,7 @@
           <a:p>
             <a:fld id="{D95F3F3F-3E05-4475-BDF7-9F1F10448BC5}" type="datetimeFigureOut">
               <a:rPr lang="fr-FR" smtClean="0"/>
-              <a:t>26/03/2026</a:t>
+              <a:t>27/03/2026</a:t>
             </a:fld>
             <a:endParaRPr lang="fr-FR"/>
           </a:p>
@@ -2673,7 +2673,7 @@
           <a:p>
             <a:fld id="{D95F3F3F-3E05-4475-BDF7-9F1F10448BC5}" type="datetimeFigureOut">
               <a:rPr lang="fr-FR" smtClean="0"/>
-              <a:t>26/03/2026</a:t>
+              <a:t>27/03/2026</a:t>
             </a:fld>
             <a:endParaRPr lang="fr-FR"/>
           </a:p>
@@ -2914,7 +2914,7 @@
           <a:p>
             <a:fld id="{D95F3F3F-3E05-4475-BDF7-9F1F10448BC5}" type="datetimeFigureOut">
               <a:rPr lang="fr-FR" smtClean="0"/>
-              <a:t>26/03/2026</a:t>
+              <a:t>27/03/2026</a:t>
             </a:fld>
             <a:endParaRPr lang="fr-FR"/>
           </a:p>
@@ -6199,8 +6199,8 @@
         </p:nvSpPr>
         <p:spPr>
           <a:xfrm>
-            <a:off x="645624" y="648405"/>
-            <a:ext cx="153989" cy="76944"/>
+            <a:off x="645624" y="631738"/>
+            <a:ext cx="153989" cy="107722"/>
           </a:xfrm>
           <a:prstGeom prst="rect">
             <a:avLst/>
@@ -6215,7 +6215,7 @@
           <a:p>
             <a:pPr algn="ctr"/>
             <a:r>
-              <a:rPr kumimoji="0" lang="en-US" sz="500" b="1" i="0" u="none" strike="noStrike" kern="1200" cap="none" spc="0" normalizeH="0" baseline="0" noProof="0" dirty="0">
+              <a:rPr kumimoji="0" lang="en-US" sz="700" b="1" i="0" u="none" strike="noStrike" kern="1200" cap="none" spc="0" normalizeH="0" baseline="0" noProof="0" dirty="0">
                 <a:ln>
                   <a:noFill/>
                 </a:ln>
@@ -6231,7 +6231,7 @@
               </a:rPr>
               <a:t>TSM</a:t>
             </a:r>
-            <a:endParaRPr lang="en-US" dirty="0"/>
+            <a:endParaRPr lang="en-US" sz="2400" dirty="0"/>
           </a:p>
         </p:txBody>
       </p:sp>

--- a/icons/splashscreens.pptx
+++ b/icons/splashscreens.pptx
@@ -264,7 +264,7 @@
           <a:p>
             <a:fld id="{D95F3F3F-3E05-4475-BDF7-9F1F10448BC5}" type="datetimeFigureOut">
               <a:rPr lang="fr-FR" smtClean="0"/>
-              <a:t>27/03/2026</a:t>
+              <a:t>07/05/2026</a:t>
             </a:fld>
             <a:endParaRPr lang="fr-FR"/>
           </a:p>
@@ -462,7 +462,7 @@
           <a:p>
             <a:fld id="{D95F3F3F-3E05-4475-BDF7-9F1F10448BC5}" type="datetimeFigureOut">
               <a:rPr lang="fr-FR" smtClean="0"/>
-              <a:t>27/03/2026</a:t>
+              <a:t>07/05/2026</a:t>
             </a:fld>
             <a:endParaRPr lang="fr-FR"/>
           </a:p>
@@ -670,7 +670,7 @@
           <a:p>
             <a:fld id="{D95F3F3F-3E05-4475-BDF7-9F1F10448BC5}" type="datetimeFigureOut">
               <a:rPr lang="fr-FR" smtClean="0"/>
-              <a:t>27/03/2026</a:t>
+              <a:t>07/05/2026</a:t>
             </a:fld>
             <a:endParaRPr lang="fr-FR"/>
           </a:p>
@@ -868,7 +868,7 @@
           <a:p>
             <a:fld id="{D95F3F3F-3E05-4475-BDF7-9F1F10448BC5}" type="datetimeFigureOut">
               <a:rPr lang="fr-FR" smtClean="0"/>
-              <a:t>27/03/2026</a:t>
+              <a:t>07/05/2026</a:t>
             </a:fld>
             <a:endParaRPr lang="fr-FR"/>
           </a:p>
@@ -1143,7 +1143,7 @@
           <a:p>
             <a:fld id="{D95F3F3F-3E05-4475-BDF7-9F1F10448BC5}" type="datetimeFigureOut">
               <a:rPr lang="fr-FR" smtClean="0"/>
-              <a:t>27/03/2026</a:t>
+              <a:t>07/05/2026</a:t>
             </a:fld>
             <a:endParaRPr lang="fr-FR"/>
           </a:p>
@@ -1408,7 +1408,7 @@
           <a:p>
             <a:fld id="{D95F3F3F-3E05-4475-BDF7-9F1F10448BC5}" type="datetimeFigureOut">
               <a:rPr lang="fr-FR" smtClean="0"/>
-              <a:t>27/03/2026</a:t>
+              <a:t>07/05/2026</a:t>
             </a:fld>
             <a:endParaRPr lang="fr-FR"/>
           </a:p>
@@ -1820,7 +1820,7 @@
           <a:p>
             <a:fld id="{D95F3F3F-3E05-4475-BDF7-9F1F10448BC5}" type="datetimeFigureOut">
               <a:rPr lang="fr-FR" smtClean="0"/>
-              <a:t>27/03/2026</a:t>
+              <a:t>07/05/2026</a:t>
             </a:fld>
             <a:endParaRPr lang="fr-FR"/>
           </a:p>
@@ -1961,7 +1961,7 @@
           <a:p>
             <a:fld id="{D95F3F3F-3E05-4475-BDF7-9F1F10448BC5}" type="datetimeFigureOut">
               <a:rPr lang="fr-FR" smtClean="0"/>
-              <a:t>27/03/2026</a:t>
+              <a:t>07/05/2026</a:t>
             </a:fld>
             <a:endParaRPr lang="fr-FR"/>
           </a:p>
@@ -2074,7 +2074,7 @@
           <a:p>
             <a:fld id="{D95F3F3F-3E05-4475-BDF7-9F1F10448BC5}" type="datetimeFigureOut">
               <a:rPr lang="fr-FR" smtClean="0"/>
-              <a:t>27/03/2026</a:t>
+              <a:t>07/05/2026</a:t>
             </a:fld>
             <a:endParaRPr lang="fr-FR"/>
           </a:p>
@@ -2385,7 +2385,7 @@
           <a:p>
             <a:fld id="{D95F3F3F-3E05-4475-BDF7-9F1F10448BC5}" type="datetimeFigureOut">
               <a:rPr lang="fr-FR" smtClean="0"/>
-              <a:t>27/03/2026</a:t>
+              <a:t>07/05/2026</a:t>
             </a:fld>
             <a:endParaRPr lang="fr-FR"/>
           </a:p>
@@ -2673,7 +2673,7 @@
           <a:p>
             <a:fld id="{D95F3F3F-3E05-4475-BDF7-9F1F10448BC5}" type="datetimeFigureOut">
               <a:rPr lang="fr-FR" smtClean="0"/>
-              <a:t>27/03/2026</a:t>
+              <a:t>07/05/2026</a:t>
             </a:fld>
             <a:endParaRPr lang="fr-FR"/>
           </a:p>
@@ -2914,7 +2914,7 @@
           <a:p>
             <a:fld id="{D95F3F3F-3E05-4475-BDF7-9F1F10448BC5}" type="datetimeFigureOut">
               <a:rPr lang="fr-FR" smtClean="0"/>
-              <a:t>27/03/2026</a:t>
+              <a:t>07/05/2026</a:t>
             </a:fld>
             <a:endParaRPr lang="fr-FR"/>
           </a:p>
@@ -4845,7 +4845,7 @@
                 <a:latin typeface="+mj-lt"/>
                 <a:cs typeface="Arial" panose="020B0604020202020204" pitchFamily="34" charset="0"/>
               </a:rPr>
-              <a:t> 2025</a:t>
+              <a:t> 2026</a:t>
             </a:r>
           </a:p>
         </p:txBody>

--- a/icons/splashscreens.pptx
+++ b/icons/splashscreens.pptx
@@ -264,7 +264,7 @@
           <a:p>
             <a:fld id="{D95F3F3F-3E05-4475-BDF7-9F1F10448BC5}" type="datetimeFigureOut">
               <a:rPr lang="fr-FR" smtClean="0"/>
-              <a:t>07/05/2026</a:t>
+              <a:t>09/06/2026</a:t>
             </a:fld>
             <a:endParaRPr lang="fr-FR"/>
           </a:p>
@@ -462,7 +462,7 @@
           <a:p>
             <a:fld id="{D95F3F3F-3E05-4475-BDF7-9F1F10448BC5}" type="datetimeFigureOut">
               <a:rPr lang="fr-FR" smtClean="0"/>
-              <a:t>07/05/2026</a:t>
+              <a:t>09/06/2026</a:t>
             </a:fld>
             <a:endParaRPr lang="fr-FR"/>
           </a:p>
@@ -670,7 +670,7 @@
           <a:p>
             <a:fld id="{D95F3F3F-3E05-4475-BDF7-9F1F10448BC5}" type="datetimeFigureOut">
               <a:rPr lang="fr-FR" smtClean="0"/>
-              <a:t>07/05/2026</a:t>
+              <a:t>09/06/2026</a:t>
             </a:fld>
             <a:endParaRPr lang="fr-FR"/>
           </a:p>
@@ -868,7 +868,7 @@
           <a:p>
             <a:fld id="{D95F3F3F-3E05-4475-BDF7-9F1F10448BC5}" type="datetimeFigureOut">
               <a:rPr lang="fr-FR" smtClean="0"/>
-              <a:t>07/05/2026</a:t>
+              <a:t>09/06/2026</a:t>
             </a:fld>
             <a:endParaRPr lang="fr-FR"/>
           </a:p>
@@ -1143,7 +1143,7 @@
           <a:p>
             <a:fld id="{D95F3F3F-3E05-4475-BDF7-9F1F10448BC5}" type="datetimeFigureOut">
               <a:rPr lang="fr-FR" smtClean="0"/>
-              <a:t>07/05/2026</a:t>
+              <a:t>09/06/2026</a:t>
             </a:fld>
             <a:endParaRPr lang="fr-FR"/>
           </a:p>
@@ -1408,7 +1408,7 @@
           <a:p>
             <a:fld id="{D95F3F3F-3E05-4475-BDF7-9F1F10448BC5}" type="datetimeFigureOut">
               <a:rPr lang="fr-FR" smtClean="0"/>
-              <a:t>07/05/2026</a:t>
+              <a:t>09/06/2026</a:t>
             </a:fld>
             <a:endParaRPr lang="fr-FR"/>
           </a:p>
@@ -1820,7 +1820,7 @@
           <a:p>
             <a:fld id="{D95F3F3F-3E05-4475-BDF7-9F1F10448BC5}" type="datetimeFigureOut">
               <a:rPr lang="fr-FR" smtClean="0"/>
-              <a:t>07/05/2026</a:t>
+              <a:t>09/06/2026</a:t>
             </a:fld>
             <a:endParaRPr lang="fr-FR"/>
           </a:p>
@@ -1961,7 +1961,7 @@
           <a:p>
             <a:fld id="{D95F3F3F-3E05-4475-BDF7-9F1F10448BC5}" type="datetimeFigureOut">
               <a:rPr lang="fr-FR" smtClean="0"/>
-              <a:t>07/05/2026</a:t>
+              <a:t>09/06/2026</a:t>
             </a:fld>
             <a:endParaRPr lang="fr-FR"/>
           </a:p>
@@ -2074,7 +2074,7 @@
           <a:p>
             <a:fld id="{D95F3F3F-3E05-4475-BDF7-9F1F10448BC5}" type="datetimeFigureOut">
               <a:rPr lang="fr-FR" smtClean="0"/>
-              <a:t>07/05/2026</a:t>
+              <a:t>09/06/2026</a:t>
             </a:fld>
             <a:endParaRPr lang="fr-FR"/>
           </a:p>
@@ -2385,7 +2385,7 @@
           <a:p>
             <a:fld id="{D95F3F3F-3E05-4475-BDF7-9F1F10448BC5}" type="datetimeFigureOut">
               <a:rPr lang="fr-FR" smtClean="0"/>
-              <a:t>07/05/2026</a:t>
+              <a:t>09/06/2026</a:t>
             </a:fld>
             <a:endParaRPr lang="fr-FR"/>
           </a:p>
@@ -2673,7 +2673,7 @@
           <a:p>
             <a:fld id="{D95F3F3F-3E05-4475-BDF7-9F1F10448BC5}" type="datetimeFigureOut">
               <a:rPr lang="fr-FR" smtClean="0"/>
-              <a:t>07/05/2026</a:t>
+              <a:t>09/06/2026</a:t>
             </a:fld>
             <a:endParaRPr lang="fr-FR"/>
           </a:p>
@@ -2914,7 +2914,7 @@
           <a:p>
             <a:fld id="{D95F3F3F-3E05-4475-BDF7-9F1F10448BC5}" type="datetimeFigureOut">
               <a:rPr lang="fr-FR" smtClean="0"/>
-              <a:t>07/05/2026</a:t>
+              <a:t>09/06/2026</a:t>
             </a:fld>
             <a:endParaRPr lang="fr-FR"/>
           </a:p>
@@ -7047,7 +7047,7 @@
                 <a:latin typeface="+mj-lt"/>
                 <a:cs typeface="Arial" panose="020B0604020202020204" pitchFamily="34" charset="0"/>
               </a:rPr>
-              <a:t> 2025</a:t>
+              <a:t> 2026</a:t>
             </a:r>
           </a:p>
         </p:txBody>
